--- a/Superstore.pptx
+++ b/Superstore.pptx
@@ -17,11 +17,12 @@
     <p:sldId id="267" r:id="rId11"/>
     <p:sldId id="268" r:id="rId12"/>
     <p:sldId id="270" r:id="rId13"/>
-    <p:sldId id="271" r:id="rId14"/>
-    <p:sldId id="272" r:id="rId15"/>
-    <p:sldId id="273" r:id="rId16"/>
-    <p:sldId id="274" r:id="rId17"/>
-    <p:sldId id="264" r:id="rId18"/>
+    <p:sldId id="275" r:id="rId14"/>
+    <p:sldId id="271" r:id="rId15"/>
+    <p:sldId id="272" r:id="rId16"/>
+    <p:sldId id="273" r:id="rId17"/>
+    <p:sldId id="274" r:id="rId18"/>
+    <p:sldId id="264" r:id="rId19"/>
   </p:sldIdLst>
   <p:sldSz cx="12192000" cy="6858000"/>
   <p:notesSz cx="6858000" cy="9144000"/>
@@ -277,7 +278,7 @@
           <a:p>
             <a:fld id="{F315B691-4401-4F6C-9B87-0382C53D9880}" type="datetimeFigureOut">
               <a:rPr lang="en-IN" smtClean="0"/>
-              <a:t>17-04-2026</a:t>
+              <a:t>04-05-2026</a:t>
             </a:fld>
             <a:endParaRPr lang="en-IN"/>
           </a:p>
@@ -477,7 +478,7 @@
           <a:p>
             <a:fld id="{F315B691-4401-4F6C-9B87-0382C53D9880}" type="datetimeFigureOut">
               <a:rPr lang="en-IN" smtClean="0"/>
-              <a:t>17-04-2026</a:t>
+              <a:t>04-05-2026</a:t>
             </a:fld>
             <a:endParaRPr lang="en-IN"/>
           </a:p>
@@ -687,7 +688,7 @@
           <a:p>
             <a:fld id="{F315B691-4401-4F6C-9B87-0382C53D9880}" type="datetimeFigureOut">
               <a:rPr lang="en-IN" smtClean="0"/>
-              <a:t>17-04-2026</a:t>
+              <a:t>04-05-2026</a:t>
             </a:fld>
             <a:endParaRPr lang="en-IN"/>
           </a:p>
@@ -887,7 +888,7 @@
           <a:p>
             <a:fld id="{F315B691-4401-4F6C-9B87-0382C53D9880}" type="datetimeFigureOut">
               <a:rPr lang="en-IN" smtClean="0"/>
-              <a:t>17-04-2026</a:t>
+              <a:t>04-05-2026</a:t>
             </a:fld>
             <a:endParaRPr lang="en-IN"/>
           </a:p>
@@ -1163,7 +1164,7 @@
           <a:p>
             <a:fld id="{F315B691-4401-4F6C-9B87-0382C53D9880}" type="datetimeFigureOut">
               <a:rPr lang="en-IN" smtClean="0"/>
-              <a:t>17-04-2026</a:t>
+              <a:t>04-05-2026</a:t>
             </a:fld>
             <a:endParaRPr lang="en-IN"/>
           </a:p>
@@ -1431,7 +1432,7 @@
           <a:p>
             <a:fld id="{F315B691-4401-4F6C-9B87-0382C53D9880}" type="datetimeFigureOut">
               <a:rPr lang="en-IN" smtClean="0"/>
-              <a:t>17-04-2026</a:t>
+              <a:t>04-05-2026</a:t>
             </a:fld>
             <a:endParaRPr lang="en-IN"/>
           </a:p>
@@ -1846,7 +1847,7 @@
           <a:p>
             <a:fld id="{F315B691-4401-4F6C-9B87-0382C53D9880}" type="datetimeFigureOut">
               <a:rPr lang="en-IN" smtClean="0"/>
-              <a:t>17-04-2026</a:t>
+              <a:t>04-05-2026</a:t>
             </a:fld>
             <a:endParaRPr lang="en-IN"/>
           </a:p>
@@ -1988,7 +1989,7 @@
           <a:p>
             <a:fld id="{F315B691-4401-4F6C-9B87-0382C53D9880}" type="datetimeFigureOut">
               <a:rPr lang="en-IN" smtClean="0"/>
-              <a:t>17-04-2026</a:t>
+              <a:t>04-05-2026</a:t>
             </a:fld>
             <a:endParaRPr lang="en-IN"/>
           </a:p>
@@ -2101,7 +2102,7 @@
           <a:p>
             <a:fld id="{F315B691-4401-4F6C-9B87-0382C53D9880}" type="datetimeFigureOut">
               <a:rPr lang="en-IN" smtClean="0"/>
-              <a:t>17-04-2026</a:t>
+              <a:t>04-05-2026</a:t>
             </a:fld>
             <a:endParaRPr lang="en-IN"/>
           </a:p>
@@ -2414,7 +2415,7 @@
           <a:p>
             <a:fld id="{F315B691-4401-4F6C-9B87-0382C53D9880}" type="datetimeFigureOut">
               <a:rPr lang="en-IN" smtClean="0"/>
-              <a:t>17-04-2026</a:t>
+              <a:t>04-05-2026</a:t>
             </a:fld>
             <a:endParaRPr lang="en-IN"/>
           </a:p>
@@ -2703,7 +2704,7 @@
           <a:p>
             <a:fld id="{F315B691-4401-4F6C-9B87-0382C53D9880}" type="datetimeFigureOut">
               <a:rPr lang="en-IN" smtClean="0"/>
-              <a:t>17-04-2026</a:t>
+              <a:t>04-05-2026</a:t>
             </a:fld>
             <a:endParaRPr lang="en-IN"/>
           </a:p>
@@ -2946,7 +2947,7 @@
           <a:p>
             <a:fld id="{F315B691-4401-4F6C-9B87-0382C53D9880}" type="datetimeFigureOut">
               <a:rPr lang="en-IN" smtClean="0"/>
-              <a:t>17-04-2026</a:t>
+              <a:t>04-05-2026</a:t>
             </a:fld>
             <a:endParaRPr lang="en-IN"/>
           </a:p>
@@ -3877,41 +3878,12 @@
           <a:chExt cx="0" cy="0"/>
         </a:xfrm>
       </p:grpSpPr>
-      <p:sp>
-        <p:nvSpPr>
-          <p:cNvPr id="2" name="Title 1">
-            <a:extLst>
-              <a:ext uri="{FF2B5EF4-FFF2-40B4-BE49-F238E27FC236}">
-                <a16:creationId xmlns:a16="http://schemas.microsoft.com/office/drawing/2014/main" id="{4768EE77-B177-D235-90DC-0B343AC88BC3}"/>
-              </a:ext>
-            </a:extLst>
-          </p:cNvPr>
-          <p:cNvSpPr>
-            <a:spLocks noGrp="1"/>
-          </p:cNvSpPr>
-          <p:nvPr>
-            <p:ph type="title"/>
-          </p:nvPr>
-        </p:nvSpPr>
-        <p:spPr/>
-        <p:txBody>
-          <a:bodyPr/>
-          <a:lstStyle/>
-          <a:p>
-            <a:pPr algn="ctr"/>
-            <a:r>
-              <a:rPr lang="en-IN" dirty="0"/>
-              <a:t>Discount impact</a:t>
-            </a:r>
-          </a:p>
-        </p:txBody>
-      </p:sp>
       <p:pic>
         <p:nvPicPr>
-          <p:cNvPr id="4" name="Picture 3">
-            <a:extLst>
-              <a:ext uri="{FF2B5EF4-FFF2-40B4-BE49-F238E27FC236}">
-                <a16:creationId xmlns:a16="http://schemas.microsoft.com/office/drawing/2014/main" id="{BF8E7B22-9212-47A9-CCEC-7D9C541E9EE2}"/>
+          <p:cNvPr id="3" name="Picture 2">
+            <a:extLst>
+              <a:ext uri="{FF2B5EF4-FFF2-40B4-BE49-F238E27FC236}">
+                <a16:creationId xmlns:a16="http://schemas.microsoft.com/office/drawing/2014/main" id="{8643D5EB-8FFE-BEC5-24AE-D7F4A6AD0879}"/>
               </a:ext>
             </a:extLst>
           </p:cNvPr>
@@ -3928,85 +3900,18 @@
         </p:blipFill>
         <p:spPr>
           <a:xfrm>
-            <a:off x="384379" y="1690688"/>
-            <a:ext cx="4199631" cy="4802187"/>
+            <a:off x="775254" y="594310"/>
+            <a:ext cx="9710850" cy="5659005"/>
           </a:xfrm>
           <a:prstGeom prst="rect">
             <a:avLst/>
           </a:prstGeom>
         </p:spPr>
       </p:pic>
-      <p:sp>
-        <p:nvSpPr>
-          <p:cNvPr id="5" name="TextBox 4">
-            <a:extLst>
-              <a:ext uri="{FF2B5EF4-FFF2-40B4-BE49-F238E27FC236}">
-                <a16:creationId xmlns:a16="http://schemas.microsoft.com/office/drawing/2014/main" id="{1B090EEC-92F9-22CF-680E-4B589F19AD16}"/>
-              </a:ext>
-            </a:extLst>
-          </p:cNvPr>
-          <p:cNvSpPr txBox="1"/>
-          <p:nvPr/>
-        </p:nvSpPr>
-        <p:spPr>
-          <a:xfrm>
-            <a:off x="6330716" y="2988107"/>
-            <a:ext cx="3981781" cy="1384995"/>
-          </a:xfrm>
-          <a:prstGeom prst="rect">
-            <a:avLst/>
-          </a:prstGeom>
-          <a:noFill/>
-        </p:spPr>
-        <p:txBody>
-          <a:bodyPr wrap="square" rtlCol="0">
-            <a:spAutoFit/>
-          </a:bodyPr>
-          <a:lstStyle/>
-          <a:p>
-            <a:pPr algn="ctr"/>
-            <a:r>
-              <a:rPr lang="en-US" sz="2800" b="1" dirty="0">
-                <a:solidFill>
-                  <a:srgbClr val="FF0000"/>
-                </a:solidFill>
-              </a:rPr>
-              <a:t>No Profit for </a:t>
-            </a:r>
-          </a:p>
-          <a:p>
-            <a:pPr algn="ctr"/>
-            <a:r>
-              <a:rPr lang="en-US" sz="2800" b="1" dirty="0">
-                <a:solidFill>
-                  <a:srgbClr val="FF0000"/>
-                </a:solidFill>
-              </a:rPr>
-              <a:t>Discount </a:t>
-            </a:r>
-          </a:p>
-          <a:p>
-            <a:pPr algn="ctr"/>
-            <a:r>
-              <a:rPr lang="en-US" sz="2800" b="1" dirty="0">
-                <a:solidFill>
-                  <a:srgbClr val="FF0000"/>
-                </a:solidFill>
-              </a:rPr>
-              <a:t>of 30% &amp; above</a:t>
-            </a:r>
-            <a:endParaRPr lang="en-IN" sz="2800" b="1" dirty="0">
-              <a:solidFill>
-                <a:srgbClr val="FF0000"/>
-              </a:solidFill>
-            </a:endParaRPr>
-          </a:p>
-        </p:txBody>
-      </p:sp>
     </p:spTree>
     <p:extLst>
       <p:ext uri="{BB962C8B-B14F-4D97-AF65-F5344CB8AC3E}">
-        <p14:creationId xmlns:p14="http://schemas.microsoft.com/office/powerpoint/2010/main" val="1000070892"/>
+        <p14:creationId xmlns:p14="http://schemas.microsoft.com/office/powerpoint/2010/main" val="1187953500"/>
       </p:ext>
     </p:extLst>
   </p:cSld>
@@ -4038,7 +3943,7 @@
           <p:cNvPr id="2" name="Title 1">
             <a:extLst>
               <a:ext uri="{FF2B5EF4-FFF2-40B4-BE49-F238E27FC236}">
-                <a16:creationId xmlns:a16="http://schemas.microsoft.com/office/drawing/2014/main" id="{EEE0904C-956D-D270-06DC-8C6DA0959A45}"/>
+                <a16:creationId xmlns:a16="http://schemas.microsoft.com/office/drawing/2014/main" id="{4768EE77-B177-D235-90DC-0B343AC88BC3}"/>
               </a:ext>
             </a:extLst>
           </p:cNvPr>
@@ -4049,28 +3954,120 @@
             <p:ph type="title"/>
           </p:nvPr>
         </p:nvSpPr>
+        <p:spPr/>
+        <p:txBody>
+          <a:bodyPr/>
+          <a:lstStyle/>
+          <a:p>
+            <a:pPr algn="ctr"/>
+            <a:r>
+              <a:rPr lang="en-IN" dirty="0"/>
+              <a:t>Discount impact</a:t>
+            </a:r>
+          </a:p>
+        </p:txBody>
+      </p:sp>
+      <p:pic>
+        <p:nvPicPr>
+          <p:cNvPr id="4" name="Picture 3">
+            <a:extLst>
+              <a:ext uri="{FF2B5EF4-FFF2-40B4-BE49-F238E27FC236}">
+                <a16:creationId xmlns:a16="http://schemas.microsoft.com/office/drawing/2014/main" id="{BF8E7B22-9212-47A9-CCEC-7D9C541E9EE2}"/>
+              </a:ext>
+            </a:extLst>
+          </p:cNvPr>
+          <p:cNvPicPr>
+            <a:picLocks noChangeAspect="1"/>
+          </p:cNvPicPr>
+          <p:nvPr/>
+        </p:nvPicPr>
+        <p:blipFill>
+          <a:blip r:embed="rId2"/>
+          <a:stretch>
+            <a:fillRect/>
+          </a:stretch>
+        </p:blipFill>
         <p:spPr>
           <a:xfrm>
-            <a:off x="513736" y="2503641"/>
-            <a:ext cx="10515600" cy="1325563"/>
+            <a:off x="384379" y="1690688"/>
+            <a:ext cx="4199631" cy="4802187"/>
           </a:xfrm>
+          <a:prstGeom prst="rect">
+            <a:avLst/>
+          </a:prstGeom>
         </p:spPr>
-        <p:txBody>
-          <a:bodyPr/>
+      </p:pic>
+      <p:sp>
+        <p:nvSpPr>
+          <p:cNvPr id="5" name="TextBox 4">
+            <a:extLst>
+              <a:ext uri="{FF2B5EF4-FFF2-40B4-BE49-F238E27FC236}">
+                <a16:creationId xmlns:a16="http://schemas.microsoft.com/office/drawing/2014/main" id="{1B090EEC-92F9-22CF-680E-4B589F19AD16}"/>
+              </a:ext>
+            </a:extLst>
+          </p:cNvPr>
+          <p:cNvSpPr txBox="1"/>
+          <p:nvPr/>
+        </p:nvSpPr>
+        <p:spPr>
+          <a:xfrm>
+            <a:off x="7259864" y="2280184"/>
+            <a:ext cx="3981781" cy="1384995"/>
+          </a:xfrm>
+          <a:prstGeom prst="rect">
+            <a:avLst/>
+          </a:prstGeom>
+          <a:noFill/>
+        </p:spPr>
+        <p:txBody>
+          <a:bodyPr wrap="square" rtlCol="0">
+            <a:spAutoFit/>
+          </a:bodyPr>
           <a:lstStyle/>
           <a:p>
             <a:pPr algn="ctr"/>
             <a:r>
-              <a:rPr lang="en-IN" dirty="0"/>
-              <a:t>Strategic Business Recommendations</a:t>
-            </a:r>
+              <a:rPr lang="en-US" sz="2800" b="1" dirty="0">
+                <a:solidFill>
+                  <a:srgbClr val="FF0000"/>
+                </a:solidFill>
+              </a:rPr>
+              <a:t>No Profit for </a:t>
+            </a:r>
+          </a:p>
+          <a:p>
+            <a:pPr algn="ctr"/>
+            <a:r>
+              <a:rPr lang="en-US" sz="2800" b="1" dirty="0">
+                <a:solidFill>
+                  <a:srgbClr val="FF0000"/>
+                </a:solidFill>
+              </a:rPr>
+              <a:t>Discount </a:t>
+            </a:r>
+          </a:p>
+          <a:p>
+            <a:pPr algn="ctr"/>
+            <a:r>
+              <a:rPr lang="en-US" sz="2800" b="1" dirty="0">
+                <a:solidFill>
+                  <a:srgbClr val="FF0000"/>
+                </a:solidFill>
+              </a:rPr>
+              <a:t>of 30% &amp; above</a:t>
+            </a:r>
+            <a:endParaRPr lang="en-IN" sz="2800" b="1" dirty="0">
+              <a:solidFill>
+                <a:srgbClr val="FF0000"/>
+              </a:solidFill>
+            </a:endParaRPr>
           </a:p>
         </p:txBody>
       </p:sp>
     </p:spTree>
     <p:extLst>
       <p:ext uri="{BB962C8B-B14F-4D97-AF65-F5344CB8AC3E}">
-        <p14:creationId xmlns:p14="http://schemas.microsoft.com/office/powerpoint/2010/main" val="1160040851"/>
+        <p14:creationId xmlns:p14="http://schemas.microsoft.com/office/powerpoint/2010/main" val="1000070892"/>
       </p:ext>
     </p:extLst>
   </p:cSld>
@@ -4099,6 +4096,70 @@
       </p:grpSpPr>
       <p:sp>
         <p:nvSpPr>
+          <p:cNvPr id="2" name="Title 1">
+            <a:extLst>
+              <a:ext uri="{FF2B5EF4-FFF2-40B4-BE49-F238E27FC236}">
+                <a16:creationId xmlns:a16="http://schemas.microsoft.com/office/drawing/2014/main" id="{EEE0904C-956D-D270-06DC-8C6DA0959A45}"/>
+              </a:ext>
+            </a:extLst>
+          </p:cNvPr>
+          <p:cNvSpPr>
+            <a:spLocks noGrp="1"/>
+          </p:cNvSpPr>
+          <p:nvPr>
+            <p:ph type="title"/>
+          </p:nvPr>
+        </p:nvSpPr>
+        <p:spPr>
+          <a:xfrm>
+            <a:off x="513736" y="2503641"/>
+            <a:ext cx="10515600" cy="1325563"/>
+          </a:xfrm>
+        </p:spPr>
+        <p:txBody>
+          <a:bodyPr/>
+          <a:lstStyle/>
+          <a:p>
+            <a:pPr algn="ctr"/>
+            <a:r>
+              <a:rPr lang="en-IN" dirty="0"/>
+              <a:t>Strategic Business Recommendations</a:t>
+            </a:r>
+          </a:p>
+        </p:txBody>
+      </p:sp>
+    </p:spTree>
+    <p:extLst>
+      <p:ext uri="{BB962C8B-B14F-4D97-AF65-F5344CB8AC3E}">
+        <p14:creationId xmlns:p14="http://schemas.microsoft.com/office/powerpoint/2010/main" val="1160040851"/>
+      </p:ext>
+    </p:extLst>
+  </p:cSld>
+  <p:clrMapOvr>
+    <a:masterClrMapping/>
+  </p:clrMapOvr>
+</p:sld>
+</file>
+
+<file path=ppt/slides/slide16.xml><?xml version="1.0" encoding="utf-8"?>
+<p:sld xmlns:a="http://schemas.openxmlformats.org/drawingml/2006/main" xmlns:r="http://schemas.openxmlformats.org/officeDocument/2006/relationships" xmlns:p="http://schemas.openxmlformats.org/presentationml/2006/main">
+  <p:cSld>
+    <p:spTree>
+      <p:nvGrpSpPr>
+        <p:cNvPr id="1" name=""/>
+        <p:cNvGrpSpPr/>
+        <p:nvPr/>
+      </p:nvGrpSpPr>
+      <p:grpSpPr>
+        <a:xfrm>
+          <a:off x="0" y="0"/>
+          <a:ext cx="0" cy="0"/>
+          <a:chOff x="0" y="0"/>
+          <a:chExt cx="0" cy="0"/>
+        </a:xfrm>
+      </p:grpSpPr>
+      <p:sp>
+        <p:nvSpPr>
           <p:cNvPr id="4" name="Content Placeholder 3">
             <a:extLst>
               <a:ext uri="{FF2B5EF4-FFF2-40B4-BE49-F238E27FC236}">
@@ -4168,7 +4229,7 @@
 </p:sld>
 </file>
 
-<file path=ppt/slides/slide16.xml><?xml version="1.0" encoding="utf-8"?>
+<file path=ppt/slides/slide17.xml><?xml version="1.0" encoding="utf-8"?>
 <p:sld xmlns:a="http://schemas.openxmlformats.org/drawingml/2006/main" xmlns:r="http://schemas.openxmlformats.org/officeDocument/2006/relationships" xmlns:p="http://schemas.openxmlformats.org/presentationml/2006/main">
   <p:cSld>
     <p:spTree>
@@ -4887,7 +4948,7 @@
 </p:sld>
 </file>
 
-<file path=ppt/slides/slide17.xml><?xml version="1.0" encoding="utf-8"?>
+<file path=ppt/slides/slide18.xml><?xml version="1.0" encoding="utf-8"?>
 <p:sld xmlns:a="http://schemas.openxmlformats.org/drawingml/2006/main" xmlns:r="http://schemas.openxmlformats.org/officeDocument/2006/relationships" xmlns:p="http://schemas.openxmlformats.org/presentationml/2006/main">
   <p:cSld>
     <p:spTree>
